--- a/deliverables/presentation/auar-presentation_1.pptx
+++ b/deliverables/presentation/auar-presentation_1.pptx
@@ -10662,7 +10662,7 @@
                 <a:ea typeface="Cambria" pitchFamily="34" charset="-122"/>
                 <a:cs typeface="Cambria" pitchFamily="34" charset="-120"/>
               </a:rPr>
-              <a:t>What you read</a:t>
+              <a:t>A Quick Recap</a:t>
             </a:r>
             <a:endParaRPr lang="en-US" sz="3000" dirty="0"/>
           </a:p>
